--- a/Build My Life.pptx
+++ b/Build My Life.pptx
@@ -17,8 +17,9 @@
     <p:sldId id="284" r:id="rId11"/>
     <p:sldId id="291" r:id="rId12"/>
     <p:sldId id="285" r:id="rId13"/>
-    <p:sldId id="292" r:id="rId14"/>
-    <p:sldId id="293" r:id="rId15"/>
+    <p:sldId id="294" r:id="rId14"/>
+    <p:sldId id="292" r:id="rId15"/>
+    <p:sldId id="293" r:id="rId16"/>
   </p:sldIdLst>
   <p:sldSz cx="9144000" cy="6858000" type="screen4x3"/>
   <p:notesSz cx="6858000" cy="9144000"/>
@@ -256,7 +257,7 @@
           <a:p>
             <a:fld id="{E759A0DE-F190-5444-87AC-4719D5F20D15}" type="datetimeFigureOut">
               <a:rPr lang="en-US" smtClean="0"/>
-              <a:t>7/25/26</a:t>
+              <a:t>10/16/26</a:t>
             </a:fld>
             <a:endParaRPr lang="en-US"/>
           </a:p>
@@ -426,7 +427,7 @@
           <a:p>
             <a:fld id="{E759A0DE-F190-5444-87AC-4719D5F20D15}" type="datetimeFigureOut">
               <a:rPr lang="en-US" smtClean="0"/>
-              <a:t>7/25/26</a:t>
+              <a:t>10/16/26</a:t>
             </a:fld>
             <a:endParaRPr lang="en-US"/>
           </a:p>
@@ -606,7 +607,7 @@
           <a:p>
             <a:fld id="{E759A0DE-F190-5444-87AC-4719D5F20D15}" type="datetimeFigureOut">
               <a:rPr lang="en-US" smtClean="0"/>
-              <a:t>7/25/26</a:t>
+              <a:t>10/16/26</a:t>
             </a:fld>
             <a:endParaRPr lang="en-US"/>
           </a:p>
@@ -776,7 +777,7 @@
           <a:p>
             <a:fld id="{E759A0DE-F190-5444-87AC-4719D5F20D15}" type="datetimeFigureOut">
               <a:rPr lang="en-US" smtClean="0"/>
-              <a:t>7/25/26</a:t>
+              <a:t>10/16/26</a:t>
             </a:fld>
             <a:endParaRPr lang="en-US"/>
           </a:p>
@@ -1022,7 +1023,7 @@
           <a:p>
             <a:fld id="{E759A0DE-F190-5444-87AC-4719D5F20D15}" type="datetimeFigureOut">
               <a:rPr lang="en-US" smtClean="0"/>
-              <a:t>7/25/26</a:t>
+              <a:t>10/16/26</a:t>
             </a:fld>
             <a:endParaRPr lang="en-US"/>
           </a:p>
@@ -1254,7 +1255,7 @@
           <a:p>
             <a:fld id="{E759A0DE-F190-5444-87AC-4719D5F20D15}" type="datetimeFigureOut">
               <a:rPr lang="en-US" smtClean="0"/>
-              <a:t>7/25/26</a:t>
+              <a:t>10/16/26</a:t>
             </a:fld>
             <a:endParaRPr lang="en-US"/>
           </a:p>
@@ -1621,7 +1622,7 @@
           <a:p>
             <a:fld id="{E759A0DE-F190-5444-87AC-4719D5F20D15}" type="datetimeFigureOut">
               <a:rPr lang="en-US" smtClean="0"/>
-              <a:t>7/25/26</a:t>
+              <a:t>10/16/26</a:t>
             </a:fld>
             <a:endParaRPr lang="en-US"/>
           </a:p>
@@ -1739,7 +1740,7 @@
           <a:p>
             <a:fld id="{E759A0DE-F190-5444-87AC-4719D5F20D15}" type="datetimeFigureOut">
               <a:rPr lang="en-US" smtClean="0"/>
-              <a:t>7/25/26</a:t>
+              <a:t>10/16/26</a:t>
             </a:fld>
             <a:endParaRPr lang="en-US"/>
           </a:p>
@@ -1834,7 +1835,7 @@
           <a:p>
             <a:fld id="{E759A0DE-F190-5444-87AC-4719D5F20D15}" type="datetimeFigureOut">
               <a:rPr lang="en-US" smtClean="0"/>
-              <a:t>7/25/26</a:t>
+              <a:t>10/16/26</a:t>
             </a:fld>
             <a:endParaRPr lang="en-US"/>
           </a:p>
@@ -2111,7 +2112,7 @@
           <a:p>
             <a:fld id="{E759A0DE-F190-5444-87AC-4719D5F20D15}" type="datetimeFigureOut">
               <a:rPr lang="en-US" smtClean="0"/>
-              <a:t>7/25/26</a:t>
+              <a:t>10/16/26</a:t>
             </a:fld>
             <a:endParaRPr lang="en-US"/>
           </a:p>
@@ -2368,7 +2369,7 @@
           <a:p>
             <a:fld id="{E759A0DE-F190-5444-87AC-4719D5F20D15}" type="datetimeFigureOut">
               <a:rPr lang="en-US" smtClean="0"/>
-              <a:t>7/25/26</a:t>
+              <a:t>10/16/26</a:t>
             </a:fld>
             <a:endParaRPr lang="en-US"/>
           </a:p>
@@ -2581,7 +2582,7 @@
           <a:p>
             <a:fld id="{E759A0DE-F190-5444-87AC-4719D5F20D15}" type="datetimeFigureOut">
               <a:rPr lang="en-US" smtClean="0"/>
-              <a:t>7/25/26</a:t>
+              <a:t>10/16/26</a:t>
             </a:fld>
             <a:endParaRPr lang="en-US"/>
           </a:p>
@@ -3353,7 +3354,7 @@
           </a:bodyPr>
           <a:lstStyle/>
           <a:p>
-            <a:endParaRPr lang="en-US" sz="4000" dirty="0">
+            <a:endParaRPr lang="en-US" sz="5400" dirty="0">
               <a:solidFill>
                 <a:schemeClr val="bg1"/>
               </a:solidFill>
@@ -3363,7 +3364,7 @@
           </a:p>
           <a:p>
             <a:r>
-              <a:rPr lang="en-US" sz="4000" dirty="0">
+              <a:rPr lang="en-US" sz="5400" dirty="0">
                 <a:solidFill>
                   <a:schemeClr val="bg1"/>
                 </a:solidFill>
@@ -3375,7 +3376,7 @@
           </a:p>
           <a:p>
             <a:r>
-              <a:rPr lang="en-US" sz="4000" dirty="0">
+              <a:rPr lang="en-US" sz="5400" dirty="0">
                 <a:solidFill>
                   <a:schemeClr val="bg1"/>
                 </a:solidFill>
@@ -3387,7 +3388,7 @@
           </a:p>
           <a:p>
             <a:r>
-              <a:rPr lang="en-US" sz="4000" dirty="0">
+              <a:rPr lang="en-US" sz="5400" dirty="0">
                 <a:solidFill>
                   <a:schemeClr val="bg1"/>
                 </a:solidFill>
@@ -3398,7 +3399,7 @@
             </a:r>
           </a:p>
           <a:p>
-            <a:endParaRPr lang="en-US" sz="4000" dirty="0">
+            <a:endParaRPr lang="en-US" sz="5400" dirty="0">
               <a:solidFill>
                 <a:schemeClr val="bg1"/>
               </a:solidFill>
@@ -3480,7 +3481,7 @@
           </a:bodyPr>
           <a:lstStyle/>
           <a:p>
-            <a:endParaRPr lang="en-US" sz="4000" dirty="0">
+            <a:endParaRPr lang="en-US" sz="5400" dirty="0">
               <a:solidFill>
                 <a:schemeClr val="bg1"/>
               </a:solidFill>
@@ -3490,7 +3491,7 @@
           </a:p>
           <a:p>
             <a:r>
-              <a:rPr lang="en-US" sz="4000" dirty="0">
+              <a:rPr lang="en-US" sz="5400" dirty="0">
                 <a:solidFill>
                   <a:schemeClr val="bg1"/>
                 </a:solidFill>
@@ -3502,7 +3503,7 @@
           </a:p>
           <a:p>
             <a:r>
-              <a:rPr lang="en-US" sz="4000" dirty="0">
+              <a:rPr lang="en-US" sz="5400" dirty="0">
                 <a:solidFill>
                   <a:schemeClr val="bg1"/>
                 </a:solidFill>
@@ -3514,7 +3515,7 @@
           </a:p>
           <a:p>
             <a:r>
-              <a:rPr lang="en-US" sz="4000" dirty="0">
+              <a:rPr lang="en-US" sz="5400" dirty="0">
                 <a:solidFill>
                   <a:schemeClr val="bg1"/>
                 </a:solidFill>
@@ -3526,7 +3527,7 @@
           </a:p>
           <a:p>
             <a:r>
-              <a:rPr lang="en-US" sz="4000" dirty="0">
+              <a:rPr lang="en-US" sz="5400" dirty="0">
                 <a:solidFill>
                   <a:schemeClr val="bg1"/>
                 </a:solidFill>
@@ -3537,7 +3538,7 @@
             </a:r>
           </a:p>
           <a:p>
-            <a:endParaRPr lang="en-US" sz="4000" dirty="0">
+            <a:endParaRPr lang="en-US" sz="5400" dirty="0">
               <a:solidFill>
                 <a:schemeClr val="bg1"/>
               </a:solidFill>
@@ -3619,7 +3620,7 @@
           </a:bodyPr>
           <a:lstStyle/>
           <a:p>
-            <a:endParaRPr lang="en-US" sz="4000" dirty="0">
+            <a:endParaRPr lang="en-US" sz="5400" dirty="0">
               <a:solidFill>
                 <a:schemeClr val="bg1"/>
               </a:solidFill>
@@ -3629,7 +3630,7 @@
           </a:p>
           <a:p>
             <a:r>
-              <a:rPr lang="en-US" sz="4000" dirty="0">
+              <a:rPr lang="en-US" sz="5400" dirty="0">
                 <a:solidFill>
                   <a:schemeClr val="bg1"/>
                 </a:solidFill>
@@ -3641,7 +3642,7 @@
           </a:p>
           <a:p>
             <a:r>
-              <a:rPr lang="en-US" sz="4000" dirty="0">
+              <a:rPr lang="en-US" sz="5400" dirty="0">
                 <a:solidFill>
                   <a:schemeClr val="bg1"/>
                 </a:solidFill>
@@ -3653,7 +3654,7 @@
           </a:p>
           <a:p>
             <a:r>
-              <a:rPr lang="en-US" sz="4000" dirty="0">
+              <a:rPr lang="en-US" sz="5400" dirty="0">
                 <a:solidFill>
                   <a:schemeClr val="bg1"/>
                 </a:solidFill>
@@ -3664,7 +3665,7 @@
             </a:r>
           </a:p>
           <a:p>
-            <a:endParaRPr lang="en-US" sz="4000">
+            <a:endParaRPr lang="en-US" sz="5400" dirty="0">
               <a:solidFill>
                 <a:schemeClr val="bg1"/>
               </a:solidFill>
@@ -3673,53 +3674,7 @@
             </a:endParaRPr>
           </a:p>
           <a:p>
-            <a:r>
-              <a:rPr lang="en-US" sz="4000">
-                <a:solidFill>
-                  <a:schemeClr val="bg1"/>
-                </a:solidFill>
-                <a:latin typeface="Avenir Medium" panose="02000503020000020003" pitchFamily="2" charset="0"/>
-                <a:ea typeface="Bodoni Ornaments" pitchFamily="2" charset="0"/>
-              </a:rPr>
-              <a:t>I </a:t>
-            </a:r>
-            <a:r>
-              <a:rPr lang="en-US" sz="4000" dirty="0">
-                <a:solidFill>
-                  <a:schemeClr val="bg1"/>
-                </a:solidFill>
-                <a:latin typeface="Avenir Medium" panose="02000503020000020003" pitchFamily="2" charset="0"/>
-                <a:ea typeface="Bodoni Ornaments" pitchFamily="2" charset="0"/>
-              </a:rPr>
-              <a:t>will put my trust, </a:t>
-            </a:r>
-          </a:p>
-          <a:p>
-            <a:r>
-              <a:rPr lang="en-US" sz="4000" dirty="0">
-                <a:solidFill>
-                  <a:schemeClr val="bg1"/>
-                </a:solidFill>
-                <a:latin typeface="Avenir Medium" panose="02000503020000020003" pitchFamily="2" charset="0"/>
-                <a:ea typeface="Bodoni Ornaments" pitchFamily="2" charset="0"/>
-              </a:rPr>
-              <a:t>in You alone</a:t>
-            </a:r>
-          </a:p>
-          <a:p>
-            <a:r>
-              <a:rPr lang="en-US" sz="4000" dirty="0">
-                <a:solidFill>
-                  <a:schemeClr val="bg1"/>
-                </a:solidFill>
-                <a:latin typeface="Avenir Medium" panose="02000503020000020003" pitchFamily="2" charset="0"/>
-                <a:ea typeface="Bodoni Ornaments" pitchFamily="2" charset="0"/>
-              </a:rPr>
-              <a:t>And I will not be shaken</a:t>
-            </a:r>
-          </a:p>
-          <a:p>
-            <a:endParaRPr lang="en-US" sz="4000" dirty="0">
+            <a:endParaRPr lang="en-US" sz="5400" dirty="0">
               <a:solidFill>
                 <a:schemeClr val="bg1"/>
               </a:solidFill>
@@ -3743,6 +3698,133 @@
 </file>
 
 <file path=ppt/slides/slide13.xml><?xml version="1.0" encoding="utf-8"?>
+<p:sld xmlns:a="http://schemas.openxmlformats.org/drawingml/2006/main" xmlns:r="http://schemas.openxmlformats.org/officeDocument/2006/relationships" xmlns:p="http://schemas.openxmlformats.org/presentationml/2006/main">
+  <p:cSld>
+    <p:bg>
+      <p:bgPr>
+        <a:solidFill>
+          <a:schemeClr val="tx1"/>
+        </a:solidFill>
+        <a:effectLst/>
+      </p:bgPr>
+    </p:bg>
+    <p:spTree>
+      <p:nvGrpSpPr>
+        <p:cNvPr id="1" name="">
+          <a:extLst>
+            <a:ext uri="{FF2B5EF4-FFF2-40B4-BE49-F238E27FC236}">
+              <a16:creationId xmlns:a16="http://schemas.microsoft.com/office/drawing/2014/main" id="{C934713E-8F09-B608-43BD-1F5FA4CE9B9B}"/>
+            </a:ext>
+          </a:extLst>
+        </p:cNvPr>
+        <p:cNvGrpSpPr/>
+        <p:nvPr/>
+      </p:nvGrpSpPr>
+      <p:grpSpPr>
+        <a:xfrm>
+          <a:off x="0" y="0"/>
+          <a:ext cx="0" cy="0"/>
+          <a:chOff x="0" y="0"/>
+          <a:chExt cx="0" cy="0"/>
+        </a:xfrm>
+      </p:grpSpPr>
+      <p:sp>
+        <p:nvSpPr>
+          <p:cNvPr id="3" name="Subtitle 2">
+            <a:extLst>
+              <a:ext uri="{FF2B5EF4-FFF2-40B4-BE49-F238E27FC236}">
+                <a16:creationId xmlns:a16="http://schemas.microsoft.com/office/drawing/2014/main" id="{1BE7258A-0AFF-2029-F2DA-24EF4716790E}"/>
+              </a:ext>
+            </a:extLst>
+          </p:cNvPr>
+          <p:cNvSpPr>
+            <a:spLocks noGrp="1"/>
+          </p:cNvSpPr>
+          <p:nvPr>
+            <p:ph type="subTitle" idx="1"/>
+          </p:nvPr>
+        </p:nvSpPr>
+        <p:spPr>
+          <a:xfrm>
+            <a:off x="144379" y="228600"/>
+            <a:ext cx="8903369" cy="6431280"/>
+          </a:xfrm>
+        </p:spPr>
+        <p:txBody>
+          <a:bodyPr>
+            <a:noAutofit/>
+          </a:bodyPr>
+          <a:lstStyle/>
+          <a:p>
+            <a:endParaRPr lang="en-US" sz="5400" dirty="0">
+              <a:solidFill>
+                <a:schemeClr val="bg1"/>
+              </a:solidFill>
+              <a:latin typeface="Avenir Medium" panose="02000503020000020003" pitchFamily="2" charset="0"/>
+              <a:ea typeface="Bodoni Ornaments" pitchFamily="2" charset="0"/>
+            </a:endParaRPr>
+          </a:p>
+          <a:p>
+            <a:r>
+              <a:rPr lang="en-US" sz="5400" dirty="0">
+                <a:solidFill>
+                  <a:schemeClr val="bg1"/>
+                </a:solidFill>
+                <a:latin typeface="Avenir Medium" panose="02000503020000020003" pitchFamily="2" charset="0"/>
+                <a:ea typeface="Bodoni Ornaments" pitchFamily="2" charset="0"/>
+              </a:rPr>
+              <a:t>I will put my trust, </a:t>
+            </a:r>
+          </a:p>
+          <a:p>
+            <a:r>
+              <a:rPr lang="en-US" sz="5400" dirty="0">
+                <a:solidFill>
+                  <a:schemeClr val="bg1"/>
+                </a:solidFill>
+                <a:latin typeface="Avenir Medium" panose="02000503020000020003" pitchFamily="2" charset="0"/>
+                <a:ea typeface="Bodoni Ornaments" pitchFamily="2" charset="0"/>
+              </a:rPr>
+              <a:t>in You alone</a:t>
+            </a:r>
+          </a:p>
+          <a:p>
+            <a:r>
+              <a:rPr lang="en-US" sz="5400" dirty="0">
+                <a:solidFill>
+                  <a:schemeClr val="bg1"/>
+                </a:solidFill>
+                <a:latin typeface="Avenir Medium" panose="02000503020000020003" pitchFamily="2" charset="0"/>
+                <a:ea typeface="Bodoni Ornaments" pitchFamily="2" charset="0"/>
+              </a:rPr>
+              <a:t>And I will not be shaken</a:t>
+            </a:r>
+          </a:p>
+          <a:p>
+            <a:endParaRPr lang="en-US" sz="5400" dirty="0">
+              <a:solidFill>
+                <a:schemeClr val="bg1"/>
+              </a:solidFill>
+              <a:latin typeface="Avenir Medium" panose="02000503020000020003" pitchFamily="2" charset="0"/>
+              <a:ea typeface="Bodoni Ornaments" pitchFamily="2" charset="0"/>
+            </a:endParaRPr>
+          </a:p>
+        </p:txBody>
+      </p:sp>
+    </p:spTree>
+    <p:extLst>
+      <p:ext uri="{BB962C8B-B14F-4D97-AF65-F5344CB8AC3E}">
+        <p14:creationId xmlns:p14="http://schemas.microsoft.com/office/powerpoint/2010/main" val="1955777519"/>
+      </p:ext>
+    </p:extLst>
+  </p:cSld>
+  <p:clrMapOvr>
+    <a:masterClrMapping/>
+  </p:clrMapOvr>
+</p:sld>
+</file>
+
+<file path=ppt/slides/slide14.xml><?xml version="1.0" encoding="utf-8"?>
 <p:sld xmlns:a="http://schemas.openxmlformats.org/drawingml/2006/main" xmlns:r="http://schemas.openxmlformats.org/officeDocument/2006/relationships" xmlns:p="http://schemas.openxmlformats.org/presentationml/2006/main">
   <p:cSld>
     <p:bg>
@@ -3801,7 +3883,7 @@
           </a:bodyPr>
           <a:lstStyle/>
           <a:p>
-            <a:endParaRPr lang="en-US" sz="4000" dirty="0">
+            <a:endParaRPr lang="en-US" sz="5400" dirty="0">
               <a:solidFill>
                 <a:schemeClr val="bg1"/>
               </a:solidFill>
@@ -3811,7 +3893,7 @@
           </a:p>
           <a:p>
             <a:r>
-              <a:rPr lang="en-US" sz="4000" dirty="0">
+              <a:rPr lang="en-US" sz="5400" dirty="0">
                 <a:solidFill>
                   <a:schemeClr val="bg1"/>
                 </a:solidFill>
@@ -3823,7 +3905,7 @@
           </a:p>
           <a:p>
             <a:r>
-              <a:rPr lang="en-US" sz="4000" dirty="0">
+              <a:rPr lang="en-US" sz="5400" dirty="0">
                 <a:solidFill>
                   <a:schemeClr val="bg1"/>
                 </a:solidFill>
@@ -3835,7 +3917,7 @@
           </a:p>
           <a:p>
             <a:r>
-              <a:rPr lang="en-US" sz="4000" dirty="0">
+              <a:rPr lang="en-US" sz="5400" dirty="0">
                 <a:solidFill>
                   <a:schemeClr val="bg1"/>
                 </a:solidFill>
@@ -3846,7 +3928,7 @@
             </a:r>
           </a:p>
           <a:p>
-            <a:endParaRPr lang="en-US" sz="4000" dirty="0">
+            <a:endParaRPr lang="en-US" sz="5400" dirty="0">
               <a:solidFill>
                 <a:schemeClr val="bg1"/>
               </a:solidFill>
@@ -3869,7 +3951,7 @@
 </p:sld>
 </file>
 
-<file path=ppt/slides/slide14.xml><?xml version="1.0" encoding="utf-8"?>
+<file path=ppt/slides/slide15.xml><?xml version="1.0" encoding="utf-8"?>
 <p:sld xmlns:a="http://schemas.openxmlformats.org/drawingml/2006/main" xmlns:r="http://schemas.openxmlformats.org/officeDocument/2006/relationships" xmlns:p="http://schemas.openxmlformats.org/presentationml/2006/main">
   <p:cSld>
     <p:bg>
@@ -3928,7 +4010,7 @@
           </a:bodyPr>
           <a:lstStyle/>
           <a:p>
-            <a:endParaRPr lang="en-US" sz="4000" dirty="0">
+            <a:endParaRPr lang="en-US" sz="5400" dirty="0">
               <a:solidFill>
                 <a:schemeClr val="bg1"/>
               </a:solidFill>
@@ -3938,7 +4020,7 @@
           </a:p>
           <a:p>
             <a:r>
-              <a:rPr lang="en-US" sz="4000" dirty="0">
+              <a:rPr lang="en-US" sz="5400" dirty="0">
                 <a:solidFill>
                   <a:schemeClr val="bg1"/>
                 </a:solidFill>
@@ -3950,7 +4032,7 @@
           </a:p>
           <a:p>
             <a:r>
-              <a:rPr lang="en-US" sz="4000" dirty="0">
+              <a:rPr lang="en-US" sz="5400" dirty="0">
                 <a:solidFill>
                   <a:schemeClr val="bg1"/>
                 </a:solidFill>
@@ -3962,7 +4044,7 @@
           </a:p>
           <a:p>
             <a:r>
-              <a:rPr lang="en-US" sz="4000" dirty="0">
+              <a:rPr lang="en-US" sz="5400" dirty="0">
                 <a:solidFill>
                   <a:schemeClr val="bg1"/>
                 </a:solidFill>
@@ -3974,7 +4056,7 @@
           </a:p>
           <a:p>
             <a:r>
-              <a:rPr lang="en-US" sz="4000" dirty="0">
+              <a:rPr lang="en-US" sz="5400" dirty="0">
                 <a:solidFill>
                   <a:schemeClr val="bg1"/>
                 </a:solidFill>
@@ -3985,52 +4067,13 @@
             </a:r>
           </a:p>
           <a:p>
-            <a:endParaRPr lang="en-US" sz="4000" dirty="0">
+            <a:endParaRPr lang="en-US" sz="5400" dirty="0">
               <a:solidFill>
                 <a:schemeClr val="bg1"/>
               </a:solidFill>
               <a:latin typeface="Avenir Medium" panose="02000503020000020003" pitchFamily="2" charset="0"/>
               <a:ea typeface="Bodoni Ornaments" pitchFamily="2" charset="0"/>
             </a:endParaRPr>
-          </a:p>
-        </p:txBody>
-      </p:sp>
-      <p:sp>
-        <p:nvSpPr>
-          <p:cNvPr id="2" name="TextBox 1">
-            <a:extLst>
-              <a:ext uri="{FF2B5EF4-FFF2-40B4-BE49-F238E27FC236}">
-                <a16:creationId xmlns:a16="http://schemas.microsoft.com/office/drawing/2014/main" id="{74321CC9-4D81-5D07-75D6-20E941773423}"/>
-              </a:ext>
-            </a:extLst>
-          </p:cNvPr>
-          <p:cNvSpPr txBox="1"/>
-          <p:nvPr/>
-        </p:nvSpPr>
-        <p:spPr>
-          <a:xfrm>
-            <a:off x="7390614" y="6488668"/>
-            <a:ext cx="1753386" cy="369332"/>
-          </a:xfrm>
-          <a:prstGeom prst="rect">
-            <a:avLst/>
-          </a:prstGeom>
-          <a:noFill/>
-        </p:spPr>
-        <p:txBody>
-          <a:bodyPr wrap="square" rtlCol="0">
-            <a:spAutoFit/>
-          </a:bodyPr>
-          <a:lstStyle/>
-          <a:p>
-            <a:r>
-              <a:rPr lang="en-US" dirty="0">
-                <a:solidFill>
-                  <a:schemeClr val="bg1"/>
-                </a:solidFill>
-              </a:rPr>
-              <a:t>CCLI#7102397</a:t>
-            </a:r>
           </a:p>
         </p:txBody>
       </p:sp>
@@ -4106,7 +4149,7 @@
           </a:bodyPr>
           <a:lstStyle/>
           <a:p>
-            <a:endParaRPr lang="en-US" sz="4000" dirty="0">
+            <a:endParaRPr lang="en-US" sz="5400" dirty="0">
               <a:solidFill>
                 <a:schemeClr val="bg1"/>
               </a:solidFill>
@@ -4116,7 +4159,7 @@
           </a:p>
           <a:p>
             <a:r>
-              <a:rPr lang="en-US" sz="4000" dirty="0">
+              <a:rPr lang="en-US" sz="5400" dirty="0">
                 <a:solidFill>
                   <a:schemeClr val="bg1"/>
                 </a:solidFill>
@@ -4128,7 +4171,7 @@
           </a:p>
           <a:p>
             <a:r>
-              <a:rPr lang="en-US" sz="4000" dirty="0">
+              <a:rPr lang="en-US" sz="5400" dirty="0">
                 <a:solidFill>
                   <a:schemeClr val="bg1"/>
                 </a:solidFill>
@@ -4139,8 +4182,17 @@
             </a:r>
           </a:p>
           <a:p>
-            <a:r>
-              <a:rPr lang="en-US" sz="4000" dirty="0">
+            <a:endParaRPr lang="en-US" sz="5400" dirty="0">
+              <a:solidFill>
+                <a:schemeClr val="bg1"/>
+              </a:solidFill>
+              <a:latin typeface="Avenir Medium" panose="02000503020000020003" pitchFamily="2" charset="0"/>
+              <a:ea typeface="Bodoni Ornaments" pitchFamily="2" charset="0"/>
+            </a:endParaRPr>
+          </a:p>
+          <a:p>
+            <a:r>
+              <a:rPr lang="en-US" sz="5400" dirty="0">
                 <a:solidFill>
                   <a:schemeClr val="bg1"/>
                 </a:solidFill>
@@ -4152,7 +4204,7 @@
           </a:p>
           <a:p>
             <a:r>
-              <a:rPr lang="en-US" sz="4000" dirty="0">
+              <a:rPr lang="en-US" sz="5400" dirty="0">
                 <a:solidFill>
                   <a:schemeClr val="bg1"/>
                 </a:solidFill>
@@ -4163,7 +4215,7 @@
             </a:r>
           </a:p>
           <a:p>
-            <a:endParaRPr lang="en-US" sz="4000" dirty="0">
+            <a:endParaRPr lang="en-US" sz="5400" dirty="0">
               <a:solidFill>
                 <a:schemeClr val="bg1"/>
               </a:solidFill>
@@ -4245,7 +4297,7 @@
           </a:bodyPr>
           <a:lstStyle/>
           <a:p>
-            <a:endParaRPr lang="en-US" sz="4000" dirty="0">
+            <a:endParaRPr lang="en-US" sz="5400" dirty="0">
               <a:solidFill>
                 <a:schemeClr val="bg1"/>
               </a:solidFill>
@@ -4255,7 +4307,7 @@
           </a:p>
           <a:p>
             <a:r>
-              <a:rPr lang="en-US" sz="4000" dirty="0">
+              <a:rPr lang="en-US" sz="5400" dirty="0">
                 <a:solidFill>
                   <a:schemeClr val="bg1"/>
                 </a:solidFill>
@@ -4267,7 +4319,7 @@
           </a:p>
           <a:p>
             <a:r>
-              <a:rPr lang="en-US" sz="4000" dirty="0">
+              <a:rPr lang="en-US" sz="5400" dirty="0">
                 <a:solidFill>
                   <a:schemeClr val="bg1"/>
                 </a:solidFill>
@@ -4278,8 +4330,17 @@
             </a:r>
           </a:p>
           <a:p>
-            <a:r>
-              <a:rPr lang="en-US" sz="4000" dirty="0">
+            <a:endParaRPr lang="en-US" sz="5400" dirty="0">
+              <a:solidFill>
+                <a:schemeClr val="bg1"/>
+              </a:solidFill>
+              <a:latin typeface="Avenir Medium" panose="02000503020000020003" pitchFamily="2" charset="0"/>
+              <a:ea typeface="Bodoni Ornaments" pitchFamily="2" charset="0"/>
+            </a:endParaRPr>
+          </a:p>
+          <a:p>
+            <a:r>
+              <a:rPr lang="en-US" sz="5400" dirty="0">
                 <a:solidFill>
                   <a:schemeClr val="bg1"/>
                 </a:solidFill>
@@ -4291,7 +4352,7 @@
           </a:p>
           <a:p>
             <a:r>
-              <a:rPr lang="en-US" sz="4000" dirty="0">
+              <a:rPr lang="en-US" sz="5400" dirty="0">
                 <a:solidFill>
                   <a:schemeClr val="bg1"/>
                 </a:solidFill>
@@ -4302,7 +4363,7 @@
             </a:r>
           </a:p>
           <a:p>
-            <a:endParaRPr lang="en-US" sz="4000" dirty="0">
+            <a:endParaRPr lang="en-US" sz="5400" dirty="0">
               <a:solidFill>
                 <a:schemeClr val="bg1"/>
               </a:solidFill>
@@ -4384,7 +4445,7 @@
           </a:bodyPr>
           <a:lstStyle/>
           <a:p>
-            <a:endParaRPr lang="en-US" sz="4000" dirty="0">
+            <a:endParaRPr lang="en-US" sz="5400" dirty="0">
               <a:solidFill>
                 <a:schemeClr val="bg1"/>
               </a:solidFill>
@@ -4394,7 +4455,7 @@
           </a:p>
           <a:p>
             <a:r>
-              <a:rPr lang="en-US" sz="4000" dirty="0">
+              <a:rPr lang="en-US" sz="5400" dirty="0">
                 <a:solidFill>
                   <a:schemeClr val="bg1"/>
                 </a:solidFill>
@@ -4406,7 +4467,7 @@
           </a:p>
           <a:p>
             <a:r>
-              <a:rPr lang="en-US" sz="4000" dirty="0">
+              <a:rPr lang="en-US" sz="5400" dirty="0">
                 <a:solidFill>
                   <a:schemeClr val="bg1"/>
                 </a:solidFill>
@@ -4417,8 +4478,17 @@
             </a:r>
           </a:p>
           <a:p>
-            <a:r>
-              <a:rPr lang="en-US" sz="4000" dirty="0">
+            <a:endParaRPr lang="en-US" sz="5400" dirty="0">
+              <a:solidFill>
+                <a:schemeClr val="bg1"/>
+              </a:solidFill>
+              <a:latin typeface="Avenir Medium" panose="02000503020000020003" pitchFamily="2" charset="0"/>
+              <a:ea typeface="Bodoni Ornaments" pitchFamily="2" charset="0"/>
+            </a:endParaRPr>
+          </a:p>
+          <a:p>
+            <a:r>
+              <a:rPr lang="en-US" sz="5400" dirty="0">
                 <a:solidFill>
                   <a:schemeClr val="bg1"/>
                 </a:solidFill>
@@ -4430,7 +4500,7 @@
           </a:p>
           <a:p>
             <a:r>
-              <a:rPr lang="en-US" sz="4000" dirty="0">
+              <a:rPr lang="en-US" sz="5400" dirty="0">
                 <a:solidFill>
                   <a:schemeClr val="bg1"/>
                 </a:solidFill>
@@ -4514,7 +4584,7 @@
           </a:bodyPr>
           <a:lstStyle/>
           <a:p>
-            <a:endParaRPr lang="en-US" sz="4000" dirty="0">
+            <a:endParaRPr lang="en-US" sz="5400" dirty="0">
               <a:solidFill>
                 <a:schemeClr val="bg1"/>
               </a:solidFill>
@@ -4524,7 +4594,7 @@
           </a:p>
           <a:p>
             <a:r>
-              <a:rPr lang="en-US" sz="4000" dirty="0">
+              <a:rPr lang="en-US" sz="5400" dirty="0">
                 <a:solidFill>
                   <a:schemeClr val="bg1"/>
                 </a:solidFill>
@@ -4536,7 +4606,7 @@
           </a:p>
           <a:p>
             <a:r>
-              <a:rPr lang="en-US" sz="4000" dirty="0">
+              <a:rPr lang="en-US" sz="5400" dirty="0">
                 <a:solidFill>
                   <a:schemeClr val="bg1"/>
                 </a:solidFill>
@@ -4547,8 +4617,17 @@
             </a:r>
           </a:p>
           <a:p>
-            <a:r>
-              <a:rPr lang="en-US" sz="4000" dirty="0">
+            <a:endParaRPr lang="en-US" sz="5400" dirty="0">
+              <a:solidFill>
+                <a:schemeClr val="bg1"/>
+              </a:solidFill>
+              <a:latin typeface="Avenir Medium" panose="02000503020000020003" pitchFamily="2" charset="0"/>
+              <a:ea typeface="Bodoni Ornaments" pitchFamily="2" charset="0"/>
+            </a:endParaRPr>
+          </a:p>
+          <a:p>
+            <a:r>
+              <a:rPr lang="en-US" sz="5400" dirty="0">
                 <a:solidFill>
                   <a:schemeClr val="bg1"/>
                 </a:solidFill>
@@ -4560,7 +4639,7 @@
           </a:p>
           <a:p>
             <a:r>
-              <a:rPr lang="en-US" sz="4000" dirty="0">
+              <a:rPr lang="en-US" sz="5400" dirty="0">
                 <a:solidFill>
                   <a:schemeClr val="bg1"/>
                 </a:solidFill>
@@ -4644,7 +4723,7 @@
           </a:bodyPr>
           <a:lstStyle/>
           <a:p>
-            <a:endParaRPr lang="en-US" sz="4000" dirty="0">
+            <a:endParaRPr lang="en-US" sz="5400" dirty="0">
               <a:solidFill>
                 <a:schemeClr val="bg1"/>
               </a:solidFill>
@@ -4654,7 +4733,7 @@
           </a:p>
           <a:p>
             <a:r>
-              <a:rPr lang="en-US" sz="4000" dirty="0">
+              <a:rPr lang="en-US" sz="5400" dirty="0">
                 <a:solidFill>
                   <a:schemeClr val="bg1"/>
                 </a:solidFill>
@@ -4666,7 +4745,7 @@
           </a:p>
           <a:p>
             <a:r>
-              <a:rPr lang="en-US" sz="4000" dirty="0">
+              <a:rPr lang="en-US" sz="5400" dirty="0">
                 <a:solidFill>
                   <a:schemeClr val="bg1"/>
                 </a:solidFill>
@@ -4678,7 +4757,7 @@
           </a:p>
           <a:p>
             <a:r>
-              <a:rPr lang="en-US" sz="4000" dirty="0">
+              <a:rPr lang="en-US" sz="5400" dirty="0">
                 <a:solidFill>
                   <a:schemeClr val="bg1"/>
                 </a:solidFill>
@@ -4689,7 +4768,7 @@
             </a:r>
           </a:p>
           <a:p>
-            <a:endParaRPr lang="en-US" sz="4000" dirty="0">
+            <a:endParaRPr lang="en-US" sz="5400" dirty="0">
               <a:solidFill>
                 <a:schemeClr val="bg1"/>
               </a:solidFill>
@@ -4771,7 +4850,7 @@
           </a:bodyPr>
           <a:lstStyle/>
           <a:p>
-            <a:endParaRPr lang="en-US" sz="4000" dirty="0">
+            <a:endParaRPr lang="en-US" sz="5400" dirty="0">
               <a:solidFill>
                 <a:schemeClr val="bg1"/>
               </a:solidFill>
@@ -4781,7 +4860,7 @@
           </a:p>
           <a:p>
             <a:r>
-              <a:rPr lang="en-US" sz="4000" dirty="0">
+              <a:rPr lang="en-US" sz="5400" dirty="0">
                 <a:solidFill>
                   <a:schemeClr val="bg1"/>
                 </a:solidFill>
@@ -4793,7 +4872,7 @@
           </a:p>
           <a:p>
             <a:r>
-              <a:rPr lang="en-US" sz="4000" dirty="0">
+              <a:rPr lang="en-US" sz="5400" dirty="0">
                 <a:solidFill>
                   <a:schemeClr val="bg1"/>
                 </a:solidFill>
@@ -4805,7 +4884,7 @@
           </a:p>
           <a:p>
             <a:r>
-              <a:rPr lang="en-US" sz="4000" dirty="0">
+              <a:rPr lang="en-US" sz="5400" dirty="0">
                 <a:solidFill>
                   <a:schemeClr val="bg1"/>
                 </a:solidFill>
@@ -4817,7 +4896,7 @@
           </a:p>
           <a:p>
             <a:r>
-              <a:rPr lang="en-US" sz="4000" dirty="0">
+              <a:rPr lang="en-US" sz="5400" dirty="0">
                 <a:solidFill>
                   <a:schemeClr val="bg1"/>
                 </a:solidFill>
@@ -4828,7 +4907,7 @@
             </a:r>
           </a:p>
           <a:p>
-            <a:endParaRPr lang="en-US" sz="4000" dirty="0">
+            <a:endParaRPr lang="en-US" sz="5400" dirty="0">
               <a:solidFill>
                 <a:schemeClr val="bg1"/>
               </a:solidFill>
@@ -4910,7 +4989,7 @@
           </a:bodyPr>
           <a:lstStyle/>
           <a:p>
-            <a:endParaRPr lang="en-US" sz="4000" dirty="0">
+            <a:endParaRPr lang="en-US" sz="5400" dirty="0">
               <a:solidFill>
                 <a:schemeClr val="bg1"/>
               </a:solidFill>
@@ -4920,7 +4999,7 @@
           </a:p>
           <a:p>
             <a:r>
-              <a:rPr lang="en-US" sz="4000" dirty="0">
+              <a:rPr lang="en-US" sz="5400" dirty="0">
                 <a:solidFill>
                   <a:schemeClr val="bg1"/>
                 </a:solidFill>
@@ -4932,7 +5011,7 @@
           </a:p>
           <a:p>
             <a:r>
-              <a:rPr lang="en-US" sz="4000" dirty="0">
+              <a:rPr lang="en-US" sz="5400" dirty="0">
                 <a:solidFill>
                   <a:schemeClr val="bg1"/>
                 </a:solidFill>
@@ -4943,8 +5022,17 @@
             </a:r>
           </a:p>
           <a:p>
-            <a:r>
-              <a:rPr lang="en-US" sz="4000" dirty="0">
+            <a:endParaRPr lang="en-US" sz="5400" dirty="0">
+              <a:solidFill>
+                <a:schemeClr val="bg1"/>
+              </a:solidFill>
+              <a:latin typeface="Avenir Medium" panose="02000503020000020003" pitchFamily="2" charset="0"/>
+              <a:ea typeface="Bodoni Ornaments" pitchFamily="2" charset="0"/>
+            </a:endParaRPr>
+          </a:p>
+          <a:p>
+            <a:r>
+              <a:rPr lang="en-US" sz="5400" dirty="0">
                 <a:solidFill>
                   <a:schemeClr val="bg1"/>
                 </a:solidFill>
@@ -4956,7 +5044,7 @@
           </a:p>
           <a:p>
             <a:r>
-              <a:rPr lang="en-US" sz="4000" dirty="0">
+              <a:rPr lang="en-US" sz="5400" dirty="0">
                 <a:solidFill>
                   <a:schemeClr val="bg1"/>
                 </a:solidFill>
@@ -5040,7 +5128,7 @@
           </a:bodyPr>
           <a:lstStyle/>
           <a:p>
-            <a:endParaRPr lang="en-US" sz="4000" dirty="0">
+            <a:endParaRPr lang="en-US" sz="5400" dirty="0">
               <a:solidFill>
                 <a:schemeClr val="bg1"/>
               </a:solidFill>
@@ -5050,7 +5138,7 @@
           </a:p>
           <a:p>
             <a:r>
-              <a:rPr lang="en-US" sz="4000" dirty="0">
+              <a:rPr lang="en-US" sz="5400" dirty="0">
                 <a:solidFill>
                   <a:schemeClr val="bg1"/>
                 </a:solidFill>
@@ -5062,7 +5150,7 @@
           </a:p>
           <a:p>
             <a:r>
-              <a:rPr lang="en-US" sz="4000" dirty="0">
+              <a:rPr lang="en-US" sz="5400" dirty="0">
                 <a:solidFill>
                   <a:schemeClr val="bg1"/>
                 </a:solidFill>
@@ -5073,8 +5161,17 @@
             </a:r>
           </a:p>
           <a:p>
-            <a:r>
-              <a:rPr lang="en-US" sz="4000" dirty="0">
+            <a:endParaRPr lang="en-US" sz="5400" dirty="0">
+              <a:solidFill>
+                <a:schemeClr val="bg1"/>
+              </a:solidFill>
+              <a:latin typeface="Avenir Medium" panose="02000503020000020003" pitchFamily="2" charset="0"/>
+              <a:ea typeface="Bodoni Ornaments" pitchFamily="2" charset="0"/>
+            </a:endParaRPr>
+          </a:p>
+          <a:p>
+            <a:r>
+              <a:rPr lang="en-US" sz="5400" dirty="0">
                 <a:solidFill>
                   <a:schemeClr val="bg1"/>
                 </a:solidFill>
@@ -5086,7 +5183,7 @@
           </a:p>
           <a:p>
             <a:r>
-              <a:rPr lang="en-US" sz="4000" dirty="0">
+              <a:rPr lang="en-US" sz="5400" dirty="0">
                 <a:solidFill>
                   <a:schemeClr val="bg1"/>
                 </a:solidFill>
